--- a/book/slides/pptx/ch05-binary-tree.pptx
+++ b/book/slides/pptx/ch05-binary-tree.pptx
@@ -547,90 +547,6 @@
 </p:notes>
 </file>
 
-<file path=ppt/notesSlides/notesSlide19.xml><?xml version="1.0" encoding="utf-8"?>
-<p:notes xmlns:a="http://schemas.openxmlformats.org/drawingml/2006/main" xmlns:r="http://schemas.openxmlformats.org/officeDocument/2006/relationships" xmlns:p="http://schemas.openxmlformats.org/presentationml/2006/main">
-  <p:cSld>
-    <p:spTree>
-      <p:nvGrpSpPr>
-        <p:cNvPr id="1" name=""/>
-        <p:cNvGrpSpPr/>
-        <p:nvPr/>
-      </p:nvGrpSpPr>
-      <p:grpSpPr>
-        <a:xfrm>
-          <a:off x="0" y="0"/>
-          <a:ext cx="0" cy="0"/>
-          <a:chOff x="0" y="0"/>
-          <a:chExt cx="0" cy="0"/>
-        </a:xfrm>
-      </p:grpSpPr>
-      <p:sp>
-        <p:nvSpPr>
-          <p:cNvPr id="2" name="备注"/>
-          <p:cNvSpPr>
-            <a:spLocks noGrp="1"/>
-          </p:cNvSpPr>
-          <p:nvPr>
-            <p:ph type="body" idx="1"/>
-          </p:nvPr>
-        </p:nvSpPr>
-        <p:spPr>
-          <a:xfrm>
-            <a:off x="457200" y="3886200"/>
-            <a:ext cx="5943600" cy="4400550"/>
-          </a:xfrm>
-          <a:prstGeom prst="rect">
-            <a:avLst/>
-          </a:prstGeom>
-        </p:spPr>
-        <p:txBody>
-          <a:bodyPr/>
-          <a:lstStyle/>
-          <a:p>
-            <a:pPr marL="0" indent="0" lvl="0">
-              <a:lnSpc>
-                <a:spcPct val="100000"/>
-              </a:lnSpc>
-              <a:buNone/>
-            </a:pPr>
-            <a:r>
-              <a:rPr lang="zh-CN" sz="1200" dirty="0">
-                <a:solidFill>
-                  <a:srgbClr val="1A1A18"/>
-                </a:solidFill>
-                <a:latin typeface="Segoe UI"/>
-                <a:ea typeface="Noto Sans CJK SC"/>
-                <a:cs typeface="Segoe UI"/>
-              </a:rPr>
-              <a:t>为什么搬最后一个上来？因为只有拿掉最后一个位置，</a:t>
-            </a:r>
-          </a:p>
-          <a:p>
-            <a:pPr marL="0" indent="0" lvl="0">
-              <a:lnSpc>
-                <a:spcPct val="100000"/>
-              </a:lnSpc>
-              <a:buNone/>
-            </a:pPr>
-            <a:r>
-              <a:rPr lang="zh-CN" sz="1200" dirty="0">
-                <a:solidFill>
-                  <a:srgbClr val="1A1A18"/>
-                </a:solidFill>
-                <a:latin typeface="Segoe UI"/>
-                <a:ea typeface="Noto Sans CJK SC"/>
-                <a:cs typeface="Segoe UI"/>
-              </a:rPr>
-              <a:t>剩下的才仍然是一棵完全二叉树。这是「完全」这个条件在还债。</a:t>
-            </a:r>
-          </a:p>
-        </p:txBody>
-      </p:sp>
-    </p:spTree>
-  </p:cSld>
-</p:notes>
-</file>
-
 <file path=ppt/notesSlides/notesSlide2.xml><?xml version="1.0" encoding="utf-8"?>
 <p:notes xmlns:a="http://schemas.openxmlformats.org/drawingml/2006/main" xmlns:r="http://schemas.openxmlformats.org/officeDocument/2006/relationships" xmlns:p="http://schemas.openxmlformats.org/presentationml/2006/main">
   <p:cSld>
@@ -706,6 +622,90 @@
                 <a:cs typeface="Segoe UI"/>
               </a:rPr>
               <a:t>这与第 6 章的一般树不同，那里孩子之间没有左右之分（只有次序）。</a:t>
+            </a:r>
+          </a:p>
+        </p:txBody>
+      </p:sp>
+    </p:spTree>
+  </p:cSld>
+</p:notes>
+</file>
+
+<file path=ppt/notesSlides/notesSlide20.xml><?xml version="1.0" encoding="utf-8"?>
+<p:notes xmlns:a="http://schemas.openxmlformats.org/drawingml/2006/main" xmlns:r="http://schemas.openxmlformats.org/officeDocument/2006/relationships" xmlns:p="http://schemas.openxmlformats.org/presentationml/2006/main">
+  <p:cSld>
+    <p:spTree>
+      <p:nvGrpSpPr>
+        <p:cNvPr id="1" name=""/>
+        <p:cNvGrpSpPr/>
+        <p:nvPr/>
+      </p:nvGrpSpPr>
+      <p:grpSpPr>
+        <a:xfrm>
+          <a:off x="0" y="0"/>
+          <a:ext cx="0" cy="0"/>
+          <a:chOff x="0" y="0"/>
+          <a:chExt cx="0" cy="0"/>
+        </a:xfrm>
+      </p:grpSpPr>
+      <p:sp>
+        <p:nvSpPr>
+          <p:cNvPr id="2" name="备注"/>
+          <p:cNvSpPr>
+            <a:spLocks noGrp="1"/>
+          </p:cNvSpPr>
+          <p:nvPr>
+            <p:ph type="body" idx="1"/>
+          </p:nvPr>
+        </p:nvSpPr>
+        <p:spPr>
+          <a:xfrm>
+            <a:off x="457200" y="3886200"/>
+            <a:ext cx="5943600" cy="4400550"/>
+          </a:xfrm>
+          <a:prstGeom prst="rect">
+            <a:avLst/>
+          </a:prstGeom>
+        </p:spPr>
+        <p:txBody>
+          <a:bodyPr/>
+          <a:lstStyle/>
+          <a:p>
+            <a:pPr marL="0" indent="0" lvl="0">
+              <a:lnSpc>
+                <a:spcPct val="100000"/>
+              </a:lnSpc>
+              <a:buNone/>
+            </a:pPr>
+            <a:r>
+              <a:rPr lang="zh-CN" sz="1200" dirty="0">
+                <a:solidFill>
+                  <a:srgbClr val="1A1A18"/>
+                </a:solidFill>
+                <a:latin typeface="Segoe UI"/>
+                <a:ea typeface="Noto Sans CJK SC"/>
+                <a:cs typeface="Segoe UI"/>
+              </a:rPr>
+              <a:t>为什么搬最后一个上来？因为只有拿掉最后一个位置，</a:t>
+            </a:r>
+          </a:p>
+          <a:p>
+            <a:pPr marL="0" indent="0" lvl="0">
+              <a:lnSpc>
+                <a:spcPct val="100000"/>
+              </a:lnSpc>
+              <a:buNone/>
+            </a:pPr>
+            <a:r>
+              <a:rPr lang="zh-CN" sz="1200" dirty="0">
+                <a:solidFill>
+                  <a:srgbClr val="1A1A18"/>
+                </a:solidFill>
+                <a:latin typeface="Segoe UI"/>
+                <a:ea typeface="Noto Sans CJK SC"/>
+                <a:cs typeface="Segoe UI"/>
+              </a:rPr>
+              <a:t>剩下的才仍然是一棵完全二叉树。这是「完全」这个条件在还债。</a:t>
             </a:r>
           </a:p>
         </p:txBody>
@@ -7858,7 +7858,7 @@
                 <a:ea typeface="Noto Sans CJK SC"/>
                 <a:cs typeface="Segoe UI"/>
               </a:rPr>
-              <a:t>删除最小：搬最后一个上来，然后下沉（续）</a:t>
+              <a:t>删除最小：搬最后一个上来，然后下沉</a:t>
             </a:r>
           </a:p>
         </p:txBody>
@@ -8994,7 +8994,7 @@
                 <a:ea typeface="Noto Sans CJK SC"/>
                 <a:cs typeface="Segoe UI"/>
               </a:rPr>
-              <a:t>建堆为什么是 O(n)（续）</a:t>
+              <a:t>建堆为什么是 O(n)</a:t>
             </a:r>
           </a:p>
         </p:txBody>

--- a/book/slides/pptx/ch05-binary-tree.pptx
+++ b/book/slides/pptx/ch05-binary-tree.pptx
@@ -7858,7 +7858,7 @@
                 <a:ea typeface="Noto Sans CJK SC"/>
                 <a:cs typeface="Segoe UI"/>
               </a:rPr>
-              <a:t>删除最小：搬最后一个上来，然后下沉</a:t>
+              <a:t>删除最小：搬最后一个上来，然后下沉（续）</a:t>
             </a:r>
           </a:p>
         </p:txBody>
@@ -8994,7 +8994,7 @@
                 <a:ea typeface="Noto Sans CJK SC"/>
                 <a:cs typeface="Segoe UI"/>
               </a:rPr>
-              <a:t>建堆为什么是 O(n)</a:t>
+              <a:t>建堆为什么是 O(n)（续）</a:t>
             </a:r>
           </a:p>
         </p:txBody>
